--- a/dist/초3/수학/자연수계산/초3_수학_자연수계산_08_나머지가있는나눗셈.pptx
+++ b/dist/초3/수학/자연수계산/초3_수학_자연수계산_08_나머지가있는나눗셈.pptx
@@ -121,13 +121,13 @@
   <p:extLst>
     <p:ext uri="{521415D9-36F7-43E2-AB2F-B90AF26B5E84}">
       <p14:sectionLst xmlns:p14="http://schemas.microsoft.com/office/powerpoint/2010/main">
-        <p14:section name="도입" id="{ee5829c2-9864-6122-6401-849b772340b9}">
+        <p14:section name="도입" id="{ead7b313-3e96-8bcb-3d01-5ee5e000a413}">
           <p14:sldIdLst>
             <p14:sldId id="256"/>
             <p14:sldId id="257"/>
           </p14:sldIdLst>
         </p14:section>
-        <p14:section name="개념" id="{12e13de8-4bb5-8f72-0b08-b87370f7c3e2}">
+        <p14:section name="개념" id="{3ad4ce6b-a4ba-1050-fba4-5b9f09172991}">
           <p14:sldIdLst>
             <p14:sldId id="258"/>
             <p14:sldId id="259"/>
@@ -136,32 +136,32 @@
             <p14:sldId id="263"/>
           </p14:sldIdLst>
         </p14:section>
-        <p14:section name="연습" id="{5e6ed8d7-91a1-43a0-c294-bd3f7aa718dc}">
+        <p14:section name="연습" id="{645e3c10-6a6d-e705-2ea9-11d5d7e3340e}">
           <p14:sldIdLst>
             <p14:sldId id="260"/>
             <p14:sldId id="264"/>
             <p14:sldId id="265"/>
           </p14:sldIdLst>
         </p14:section>
-        <p14:section name="개념" id="{bd056872-5ff2-927e-e0f7-e92386bdd6fb}">
+        <p14:section name="개념" id="{a8753235-ac2c-7c66-d4c0-3dc6449bda94}">
           <p14:sldIdLst/>
         </p14:section>
-        <p14:section name="연습" id="{09831a53-4bcb-1c9b-df57-723c44055bbb}">
+        <p14:section name="연습" id="{f18bd450-8214-2675-0565-724c7bb1c110}">
           <p14:sldIdLst/>
         </p14:section>
-        <p14:section name="확인" id="{f2a146dd-60f1-ae4b-c2cc-035487094edb}">
+        <p14:section name="확인" id="{342387fb-3525-b615-4a41-3bd8a4d3cd42}">
           <p14:sldIdLst>
             <p14:sldId id="266"/>
             <p14:sldId id="267"/>
             <p14:sldId id="268"/>
           </p14:sldIdLst>
         </p14:section>
-        <p14:section name="정리" id="{60f3a50b-5b14-fb27-1c0f-21a41c3dab5e}">
+        <p14:section name="정리" id="{5ecf8990-9695-3538-fdfa-40822c5f3365}">
           <p14:sldIdLst>
             <p14:sldId id="269"/>
           </p14:sldIdLst>
         </p14:section>
-        <p14:section name="보충" id="{7d180f31-0835-63d2-0061-02a97d8d5587}">
+        <p14:section name="보충" id="{88825e9b-afa4-8aea-a901-736dcb3f8960}">
           <p14:sldIdLst>
             <p14:sldId id="270"/>
           </p14:sldIdLst>
@@ -8756,7 +8756,7 @@
           </p:nvPr>
         </p:nvGraphicFramePr>
         <p:xfrm>
-          <a:off x="2253996" y="2245360"/>
+          <a:off x="2253996" y="2286635"/>
           <a:ext cx="7680960" cy="914400"/>
         </p:xfrm>
         <a:graphic>
@@ -8768,7 +8768,7 @@
                 <a:gridCol w="2560320"/>
                 <a:gridCol w="2560320"/>
               </a:tblGrid>
-              <a:tr h="528320">
+              <a:tr h="511810">
                 <a:tc>
                   <a:txBody>
                     <a:bodyPr/>
@@ -8974,7 +8974,7 @@
                   </a:tcPr>
                 </a:tc>
               </a:tr>
-              <a:tr h="528320">
+              <a:tr h="511810">
                 <a:tc>
                   <a:txBody>
                     <a:bodyPr/>
@@ -9180,7 +9180,7 @@
                   </a:tcPr>
                 </a:tc>
               </a:tr>
-              <a:tr h="528320">
+              <a:tr h="511810">
                 <a:tc>
                   <a:txBody>
                     <a:bodyPr/>
@@ -9386,7 +9386,7 @@
                   </a:tcPr>
                 </a:tc>
               </a:tr>
-              <a:tr h="528320">
+              <a:tr h="511810">
                 <a:tc>
                   <a:txBody>
                     <a:bodyPr/>
@@ -9592,7 +9592,7 @@
                   </a:tcPr>
                 </a:tc>
               </a:tr>
-              <a:tr h="528320">
+              <a:tr h="511810">
                 <a:tc>
                   <a:txBody>
                     <a:bodyPr/>
@@ -13496,7 +13496,7 @@
           </p:nvPr>
         </p:nvGraphicFramePr>
         <p:xfrm>
-          <a:off x="8047909" y="1374140"/>
+          <a:off x="8047909" y="1431925"/>
           <a:ext cx="3108960" cy="914400"/>
         </p:xfrm>
         <a:graphic>
@@ -13508,7 +13508,7 @@
                 <a:gridCol w="1036320"/>
                 <a:gridCol w="1036320"/>
               </a:tblGrid>
-              <a:tr h="528320">
+              <a:tr h="511810">
                 <a:tc>
                   <a:txBody>
                     <a:bodyPr/>
@@ -13703,7 +13703,7 @@
                   </a:tcPr>
                 </a:tc>
               </a:tr>
-              <a:tr h="528320">
+              <a:tr h="511810">
                 <a:tc>
                   <a:txBody>
                     <a:bodyPr/>
@@ -13898,7 +13898,7 @@
                   </a:tcPr>
                 </a:tc>
               </a:tr>
-              <a:tr h="528320">
+              <a:tr h="511810">
                 <a:tc>
                   <a:txBody>
                     <a:bodyPr/>
@@ -14104,7 +14104,7 @@
                   </a:tcPr>
                 </a:tc>
               </a:tr>
-              <a:tr h="528320">
+              <a:tr h="511810">
                 <a:tc>
                   <a:txBody>
                     <a:bodyPr/>
@@ -14288,7 +14288,7 @@
                   </a:tcPr>
                 </a:tc>
               </a:tr>
-              <a:tr h="528320">
+              <a:tr h="511810">
                 <a:tc>
                   <a:txBody>
                     <a:bodyPr/>
@@ -14483,7 +14483,7 @@
                   </a:tcPr>
                 </a:tc>
               </a:tr>
-              <a:tr h="528320">
+              <a:tr h="511810">
                 <a:tc>
                   <a:txBody>
                     <a:bodyPr/>
@@ -14678,7 +14678,7 @@
                   </a:tcPr>
                 </a:tc>
               </a:tr>
-              <a:tr h="528320">
+              <a:tr h="511810">
                 <a:tc>
                   <a:txBody>
                     <a:bodyPr/>
@@ -15387,7 +15387,7 @@
           </p:nvPr>
         </p:nvGraphicFramePr>
         <p:xfrm>
-          <a:off x="7587234" y="2287524"/>
+          <a:off x="7587234" y="2337054"/>
           <a:ext cx="2743200" cy="914400"/>
         </p:xfrm>
         <a:graphic>
@@ -15399,7 +15399,7 @@
                 <a:gridCol w="914400"/>
                 <a:gridCol w="914400"/>
               </a:tblGrid>
-              <a:tr h="528320">
+              <a:tr h="511810">
                 <a:tc>
                   <a:txBody>
                     <a:bodyPr/>
@@ -15594,7 +15594,7 @@
                   </a:tcPr>
                 </a:tc>
               </a:tr>
-              <a:tr h="528320">
+              <a:tr h="511810">
                 <a:tc>
                   <a:txBody>
                     <a:bodyPr/>
@@ -15800,7 +15800,7 @@
                   </a:tcPr>
                 </a:tc>
               </a:tr>
-              <a:tr h="528320">
+              <a:tr h="511810">
                 <a:tc>
                   <a:txBody>
                     <a:bodyPr/>
@@ -15984,7 +15984,7 @@
                   </a:tcPr>
                 </a:tc>
               </a:tr>
-              <a:tr h="528320">
+              <a:tr h="511810">
                 <a:tc>
                   <a:txBody>
                     <a:bodyPr/>
@@ -16179,7 +16179,7 @@
                   </a:tcPr>
                 </a:tc>
               </a:tr>
-              <a:tr h="528320">
+              <a:tr h="511810">
                 <a:tc>
                   <a:txBody>
                     <a:bodyPr/>
@@ -16374,7 +16374,7 @@
                   </a:tcPr>
                 </a:tc>
               </a:tr>
-              <a:tr h="528320">
+              <a:tr h="511810">
                 <a:tc>
                   <a:txBody>
                     <a:bodyPr/>

--- a/dist/초3/수학/자연수계산/초3_수학_자연수계산_08_나머지가있는나눗셈.pptx
+++ b/dist/초3/수학/자연수계산/초3_수학_자연수계산_08_나머지가있는나눗셈.pptx
@@ -121,13 +121,13 @@
   <p:extLst>
     <p:ext uri="{521415D9-36F7-43E2-AB2F-B90AF26B5E84}">
       <p14:sectionLst xmlns:p14="http://schemas.microsoft.com/office/powerpoint/2010/main">
-        <p14:section name="도입" id="{ead7b313-3e96-8bcb-3d01-5ee5e000a413}">
+        <p14:section name="도입" id="{82a96293-609b-bf0e-4bfa-3bb43b5b8829}">
           <p14:sldIdLst>
             <p14:sldId id="256"/>
             <p14:sldId id="257"/>
           </p14:sldIdLst>
         </p14:section>
-        <p14:section name="개념" id="{3ad4ce6b-a4ba-1050-fba4-5b9f09172991}">
+        <p14:section name="개념" id="{f8b8f1bd-e914-e38b-3cce-7a09d3d115af}">
           <p14:sldIdLst>
             <p14:sldId id="258"/>
             <p14:sldId id="259"/>
@@ -136,32 +136,32 @@
             <p14:sldId id="263"/>
           </p14:sldIdLst>
         </p14:section>
-        <p14:section name="연습" id="{645e3c10-6a6d-e705-2ea9-11d5d7e3340e}">
+        <p14:section name="연습" id="{b90678b2-8876-8ba6-d5aa-a3ec42fec0c7}">
           <p14:sldIdLst>
             <p14:sldId id="260"/>
             <p14:sldId id="264"/>
             <p14:sldId id="265"/>
           </p14:sldIdLst>
         </p14:section>
-        <p14:section name="개념" id="{a8753235-ac2c-7c66-d4c0-3dc6449bda94}">
+        <p14:section name="개념" id="{b5b94304-4d1b-6916-e895-534e215d14f6}">
           <p14:sldIdLst/>
         </p14:section>
-        <p14:section name="연습" id="{f18bd450-8214-2675-0565-724c7bb1c110}">
+        <p14:section name="연습" id="{f1da6b84-dcf7-aa0c-4167-dc5eec16c369}">
           <p14:sldIdLst/>
         </p14:section>
-        <p14:section name="확인" id="{342387fb-3525-b615-4a41-3bd8a4d3cd42}">
+        <p14:section name="확인" id="{baf936ba-1cc1-544a-edc5-5a65789b0c32}">
           <p14:sldIdLst>
             <p14:sldId id="266"/>
             <p14:sldId id="267"/>
             <p14:sldId id="268"/>
           </p14:sldIdLst>
         </p14:section>
-        <p14:section name="정리" id="{5ecf8990-9695-3538-fdfa-40822c5f3365}">
+        <p14:section name="정리" id="{2f92421f-2dd8-aeda-916c-2558b4ed19e9}">
           <p14:sldIdLst>
             <p14:sldId id="269"/>
           </p14:sldIdLst>
         </p14:section>
-        <p14:section name="보충" id="{88825e9b-afa4-8aea-a901-736dcb3f8960}">
+        <p14:section name="보충" id="{66f041a2-3bc4-33de-fd9a-7b3db82969eb}">
           <p14:sldIdLst>
             <p14:sldId id="270"/>
           </p14:sldIdLst>
